--- a/assets/pptx/catalog-420.pptx
+++ b/assets/pptx/catalog-420.pptx
@@ -3249,7 +3249,7 @@
                 <a:ea typeface="Ebrima"/>
                 <a:cs typeface="Ebrima"/>
               </a:rPr>
-              <a:t>አባት አለኝ በሰማይ የማይጥል የማይሳኝ (2x)</a:t>
+              <a:t>አባት አለኝ በሰማይ የማይጥል የማይሳኝ 2x</a:t>
             </a:r>
           </a:p>
           <a:p>
@@ -3267,7 +3267,7 @@
                 <a:ea typeface="Ebrima"/>
                 <a:cs typeface="Ebrima"/>
               </a:rPr>
-              <a:t>አባት አለኝ በሰማይ የማይጥል የማይሳኝ (2x)</a:t>
+              <a:t>አባት አለኝ በሰማይ የማይጥል የማይሳኝ 2x</a:t>
             </a:r>
           </a:p>
           <a:p>
@@ -3285,7 +3285,7 @@
                 <a:ea typeface="Ebrima"/>
                 <a:cs typeface="Ebrima"/>
               </a:rPr>
-              <a:t>አምላክ አለኝ በሰማይ የማይጥል የማይሳኝ (2x)</a:t>
+              <a:t>አምላክ አለኝ በሰማይ የማይጥል የማይሳኝ 2x</a:t>
             </a:r>
           </a:p>
           <a:p>
@@ -3303,7 +3303,7 @@
                 <a:ea typeface="Ebrima"/>
                 <a:cs typeface="Ebrima"/>
               </a:rPr>
-              <a:t>አምላክ አለኝ በሰማይ የማይጥል የማይሳኝ (2x)</a:t>
+              <a:t>አምላክ አለኝ በሰማይ የማይጥል የማይሳኝ 2x</a:t>
             </a:r>
           </a:p>
         </p:txBody>
@@ -3370,7 +3370,7 @@
                 <a:ea typeface="Ebrima"/>
                 <a:cs typeface="Ebrima"/>
               </a:rPr>
-              <a:t>አባት አለኝ (Track 4)</a:t>
+              <a:t>አባት አለኝ Track 4</a:t>
             </a:r>
           </a:p>
         </p:txBody>
@@ -3437,7 +3437,7 @@
                 <a:ea typeface="Ebrima"/>
                 <a:cs typeface="Ebrima"/>
               </a:rPr>
-              <a:t>እገባለሁ ወደ ማደሪያው ወደ ዙፋኑ (2x)</a:t>
+              <a:t>እገባለሁ ወደ ማደሪያው ወደ ዙፋኑ 2x</a:t>
             </a:r>
           </a:p>
           <a:p>
@@ -3491,7 +3491,7 @@
                 <a:ea typeface="Ebrima"/>
                 <a:cs typeface="Ebrima"/>
               </a:rPr>
-              <a:t>ይዞ ይጠብቀኛል ንጉሱ (3x)</a:t>
+              <a:t>ይዞ ይጠብቀኛል ንጉሱ 3x</a:t>
             </a:r>
           </a:p>
         </p:txBody>
@@ -3558,7 +3558,7 @@
                 <a:ea typeface="Ebrima"/>
                 <a:cs typeface="Ebrima"/>
               </a:rPr>
-              <a:t>አላጠረም እጁ አልተደፊነም ጆሮው (2x)</a:t>
+              <a:t>አላጠረም እጁ አልተደፊነም ጆሮው 2x</a:t>
             </a:r>
           </a:p>
           <a:p>
@@ -3576,7 +3576,7 @@
                 <a:ea typeface="Ebrima"/>
                 <a:cs typeface="Ebrima"/>
               </a:rPr>
-              <a:t>አልከፍትም አንደበቴን ላጉረመርም ላሳዝን አባቴን (2x)</a:t>
+              <a:t>አልከፍትም አንደበቴን ላጉረመርም ላሳዝን አባቴን 2x</a:t>
             </a:r>
           </a:p>
         </p:txBody>
@@ -3643,7 +3643,7 @@
                 <a:ea typeface="Ebrima"/>
                 <a:cs typeface="Ebrima"/>
               </a:rPr>
-              <a:t>አባት አለኝ በሰማይ የማይጥል የማይሳኝ (2x)</a:t>
+              <a:t>አባት አለኝ በሰማይ የማይጥል የማይሳኝ 2x</a:t>
             </a:r>
           </a:p>
           <a:p>
@@ -3661,7 +3661,7 @@
                 <a:ea typeface="Ebrima"/>
                 <a:cs typeface="Ebrima"/>
               </a:rPr>
-              <a:t>አባት አለኝ በሰማይ የማይጥል የማይሳኝ (2x)</a:t>
+              <a:t>አባት አለኝ በሰማይ የማይጥል የማይሳኝ 2x</a:t>
             </a:r>
           </a:p>
           <a:p>
@@ -3679,7 +3679,7 @@
                 <a:ea typeface="Ebrima"/>
                 <a:cs typeface="Ebrima"/>
               </a:rPr>
-              <a:t>አምላክ አለኝ በሰማይ የማይጥል የማይሳኝ (2x)</a:t>
+              <a:t>አምላክ አለኝ በሰማይ የማይጥል የማይሳኝ 2x</a:t>
             </a:r>
           </a:p>
           <a:p>
@@ -3697,7 +3697,7 @@
                 <a:ea typeface="Ebrima"/>
                 <a:cs typeface="Ebrima"/>
               </a:rPr>
-              <a:t>አምላክ አለኝ በሰማይ የማይጥል የማይሳኝ (2x)</a:t>
+              <a:t>አምላክ አለኝ በሰማይ የማይጥል የማይሳኝ 2x</a:t>
             </a:r>
           </a:p>
         </p:txBody>
@@ -3939,7 +3939,7 @@
                 <a:ea typeface="Ebrima"/>
                 <a:cs typeface="Ebrima"/>
               </a:rPr>
-              <a:t>አባት አለኝ በሰማይ የማይጥል የማይሳኝ (2x)</a:t>
+              <a:t>አባት አለኝ በሰማይ የማይጥል የማይሳኝ 2x</a:t>
             </a:r>
           </a:p>
           <a:p>
@@ -3957,7 +3957,7 @@
                 <a:ea typeface="Ebrima"/>
                 <a:cs typeface="Ebrima"/>
               </a:rPr>
-              <a:t>አባት አለኝ በሰማይ የማይጥል የማይሳኝ (2x)</a:t>
+              <a:t>አባት አለኝ በሰማይ የማይጥል የማይሳኝ 2x</a:t>
             </a:r>
           </a:p>
           <a:p>
@@ -3975,7 +3975,7 @@
                 <a:ea typeface="Ebrima"/>
                 <a:cs typeface="Ebrima"/>
               </a:rPr>
-              <a:t>አምላክ አለኝ በሰማይ የማይጥል የማይሳኝ (2x)</a:t>
+              <a:t>አምላክ አለኝ በሰማይ የማይጥል የማይሳኝ 2x</a:t>
             </a:r>
           </a:p>
           <a:p>
@@ -3993,7 +3993,7 @@
                 <a:ea typeface="Ebrima"/>
                 <a:cs typeface="Ebrima"/>
               </a:rPr>
-              <a:t>አምላክ አለኝ በሰማይ የማይጥል የማይሳኝ (2x)</a:t>
+              <a:t>አምላክ አለኝ በሰማይ የማይጥል የማይሳኝ 2x</a:t>
             </a:r>
           </a:p>
         </p:txBody>
@@ -4235,7 +4235,7 @@
                 <a:ea typeface="Ebrima"/>
                 <a:cs typeface="Ebrima"/>
               </a:rPr>
-              <a:t>አላጠረም እጁ አልተደፊነም ጆሮው (2x)</a:t>
+              <a:t>አላጠረም እጁ አልተደፊነም ጆሮው 2x</a:t>
             </a:r>
           </a:p>
           <a:p>
@@ -4253,7 +4253,7 @@
                 <a:ea typeface="Ebrima"/>
                 <a:cs typeface="Ebrima"/>
               </a:rPr>
-              <a:t>አልከፍትም አንደበቴን ላጉረመርም ላሳዝን አባቴን (2x)</a:t>
+              <a:t>አልከፍትም አንደበቴን ላጉረመርም ላሳዝን አባቴን 2x</a:t>
             </a:r>
           </a:p>
         </p:txBody>
